--- a/viewers/pptx/e2e/fixtures/smartart-build-reveal.pptx
+++ b/viewers/pptx/e2e/fixtures/smartart-build-reveal.pptx
@@ -283,7 +283,9 @@
           <a:ext cx="5562600" cy="1019175"/>
         </a:xfrm>
         <a:prstGeom prst="roundRect">
-          <a:avLst/>
+          <a:avLst>
+            <a:gd name="adj" fmla="val 16667"/>
+          </a:avLst>
         </a:prstGeom>
         <a:solidFill>
           <a:srgbClr val="4472C4"/>
@@ -342,7 +344,9 @@
           <a:ext cx="5562600" cy="1019175"/>
         </a:xfrm>
         <a:prstGeom prst="roundRect">
-          <a:avLst/>
+          <a:avLst>
+            <a:gd name="adj" fmla="val 16667"/>
+          </a:avLst>
         </a:prstGeom>
         <a:solidFill>
           <a:srgbClr val="ED7D31"/>
@@ -401,7 +405,9 @@
           <a:ext cx="5562600" cy="1019175"/>
         </a:xfrm>
         <a:prstGeom prst="roundRect">
-          <a:avLst/>
+          <a:avLst>
+            <a:gd name="adj" fmla="val 16667"/>
+          </a:avLst>
         </a:prstGeom>
         <a:solidFill>
           <a:srgbClr val="A5A5A5"/>
@@ -1000,12 +1006,10 @@
           <a:bodyPr wrap="square"/>
           <a:lstStyle/>
           <a:p>
-            <a:pPr/>
             <a:r>
-              <a:rPr lang="en-US" dirty="0" sz="2400" b="1"/>
+              <a:rPr lang="en-US" sz="2400" b="1" dirty="0"/>
               <a:t>SmartArt Build Reveal Slide</a:t>
             </a:r>
-            <a:endParaRPr lang="en-US"/>
           </a:p>
         </p:txBody>
       </p:sp>
